--- a/dist/초3/국어/문학과매체/초3_국어_문학과매체_03_매체에서정보찾기.pptx
+++ b/dist/초3/국어/문학과매체/초3_국어_문학과매체_03_매체에서정보찾기.pptx
@@ -121,20 +121,20 @@
   <p:extLst>
     <p:ext uri="{521415D9-36F7-43E2-AB2F-B90AF26B5E84}">
       <p14:sectionLst xmlns:p14="http://schemas.microsoft.com/office/powerpoint/2010/main">
-        <p14:section name="도입" id="{2ba83abd-0a3a-2910-0efa-e0f9729eb61a}">
+        <p14:section name="도입" id="{965e0d53-95c5-8893-d9e7-c46cfdf37566}">
           <p14:sldIdLst>
             <p14:sldId id="256"/>
             <p14:sldId id="257"/>
           </p14:sldIdLst>
         </p14:section>
-        <p14:section name="개념" id="{b749473a-711a-53d7-7e54-f50fb1b18ae4}">
+        <p14:section name="개념" id="{f62679c0-46e8-de87-0f8c-6e73372082f2}">
           <p14:sldIdLst>
             <p14:sldId id="258"/>
             <p14:sldId id="259"/>
             <p14:sldId id="260"/>
           </p14:sldIdLst>
         </p14:section>
-        <p14:section name="연습" id="{834a3947-c65b-7129-2bd8-5284e7702c21}">
+        <p14:section name="연습" id="{4a2e43c6-8c16-df16-1818-9421140c17f9}">
           <p14:sldIdLst>
             <p14:sldId id="261"/>
             <p14:sldId id="262"/>
@@ -143,19 +143,19 @@
             <p14:sldId id="265"/>
           </p14:sldIdLst>
         </p14:section>
-        <p14:section name="확인" id="{8b611f3a-adf0-35c1-81c1-fb9c9eb3d6b4}">
+        <p14:section name="확인" id="{22df7832-619a-6469-b4e6-7edb3d200b2a}">
           <p14:sldIdLst>
             <p14:sldId id="266"/>
             <p14:sldId id="267"/>
             <p14:sldId id="268"/>
           </p14:sldIdLst>
         </p14:section>
-        <p14:section name="정리" id="{13d36ab6-6b89-4115-aae3-a212356f6e71}">
+        <p14:section name="정리" id="{0cdf6cdb-cda8-ce01-89da-69cc0179c38d}">
           <p14:sldIdLst>
             <p14:sldId id="269"/>
           </p14:sldIdLst>
         </p14:section>
-        <p14:section name="보충" id="{26f9e7fc-68bb-9228-0512-b7e1d9952fb8}">
+        <p14:section name="보충" id="{b6ed264a-79dd-8381-968f-9ba7899ae209}">
           <p14:sldIdLst>
             <p14:sldId id="270"/>
           </p14:sldIdLst>
@@ -3361,7 +3361,7 @@
           </p:nvPr>
         </p:nvGraphicFramePr>
         <p:xfrm>
-          <a:off x="6581394" y="2651760"/>
+          <a:off x="6581394" y="2697480"/>
           <a:ext cx="4754880" cy="914400"/>
         </p:xfrm>
         <a:graphic>
@@ -3372,7 +3372,7 @@
                 <a:gridCol w="1521562"/>
                 <a:gridCol w="3233318"/>
               </a:tblGrid>
-              <a:tr h="487680">
+              <a:tr h="472440">
                 <a:tc>
                   <a:txBody>
                     <a:bodyPr/>
@@ -3510,7 +3510,7 @@
                   </a:tcPr>
                 </a:tc>
               </a:tr>
-              <a:tr h="487680">
+              <a:tr h="472440">
                 <a:tc>
                   <a:txBody>
                     <a:bodyPr/>
@@ -3648,7 +3648,7 @@
                   </a:tcPr>
                 </a:tc>
               </a:tr>
-              <a:tr h="487680">
+              <a:tr h="472440">
                 <a:tc>
                   <a:txBody>
                     <a:bodyPr/>
@@ -3786,7 +3786,7 @@
                   </a:tcPr>
                 </a:tc>
               </a:tr>
-              <a:tr h="487680">
+              <a:tr h="472440">
                 <a:tc>
                   <a:txBody>
                     <a:bodyPr/>
@@ -3924,7 +3924,7 @@
                   </a:tcPr>
                 </a:tc>
               </a:tr>
-              <a:tr h="487680">
+              <a:tr h="472440">
                 <a:tc>
                   <a:txBody>
                     <a:bodyPr/>
@@ -4062,7 +4062,7 @@
                   </a:tcPr>
                 </a:tc>
               </a:tr>
-              <a:tr h="487680">
+              <a:tr h="472440">
                 <a:tc>
                   <a:txBody>
                     <a:bodyPr/>
@@ -4647,7 +4647,7 @@
           </p:nvPr>
         </p:nvGraphicFramePr>
         <p:xfrm>
-          <a:off x="6398514" y="2895600"/>
+          <a:off x="6398514" y="2933700"/>
           <a:ext cx="5120640" cy="914400"/>
         </p:xfrm>
         <a:graphic>
@@ -4658,7 +4658,7 @@
                 <a:gridCol w="1843430"/>
                 <a:gridCol w="3277210"/>
               </a:tblGrid>
-              <a:tr h="487680">
+              <a:tr h="472440">
                 <a:tc>
                   <a:txBody>
                     <a:bodyPr/>
@@ -4796,7 +4796,7 @@
                   </a:tcPr>
                 </a:tc>
               </a:tr>
-              <a:tr h="487680">
+              <a:tr h="472440">
                 <a:tc>
                   <a:txBody>
                     <a:bodyPr/>
@@ -4955,7 +4955,7 @@
                   </a:tcPr>
                 </a:tc>
               </a:tr>
-              <a:tr h="487680">
+              <a:tr h="472440">
                 <a:tc>
                   <a:txBody>
                     <a:bodyPr/>
@@ -5093,7 +5093,7 @@
                   </a:tcPr>
                 </a:tc>
               </a:tr>
-              <a:tr h="487680">
+              <a:tr h="472440">
                 <a:tc>
                   <a:txBody>
                     <a:bodyPr/>
@@ -5231,7 +5231,7 @@
                   </a:tcPr>
                 </a:tc>
               </a:tr>
-              <a:tr h="487680">
+              <a:tr h="472440">
                 <a:tc>
                   <a:txBody>
                     <a:bodyPr/>
@@ -6466,7 +6466,7 @@
           </p:nvPr>
         </p:nvGraphicFramePr>
         <p:xfrm>
-          <a:off x="6581394" y="2651760"/>
+          <a:off x="6581394" y="2697480"/>
           <a:ext cx="4754880" cy="914400"/>
         </p:xfrm>
         <a:graphic>
@@ -6477,7 +6477,7 @@
                 <a:gridCol w="1521562"/>
                 <a:gridCol w="3233318"/>
               </a:tblGrid>
-              <a:tr h="487680">
+              <a:tr h="472440">
                 <a:tc>
                   <a:txBody>
                     <a:bodyPr/>
@@ -6615,7 +6615,7 @@
                   </a:tcPr>
                 </a:tc>
               </a:tr>
-              <a:tr h="487680">
+              <a:tr h="472440">
                 <a:tc>
                   <a:txBody>
                     <a:bodyPr/>
@@ -6753,7 +6753,7 @@
                   </a:tcPr>
                 </a:tc>
               </a:tr>
-              <a:tr h="487680">
+              <a:tr h="472440">
                 <a:tc>
                   <a:txBody>
                     <a:bodyPr/>
@@ -6891,7 +6891,7 @@
                   </a:tcPr>
                 </a:tc>
               </a:tr>
-              <a:tr h="487680">
+              <a:tr h="472440">
                 <a:tc>
                   <a:txBody>
                     <a:bodyPr/>
@@ -7029,7 +7029,7 @@
                   </a:tcPr>
                 </a:tc>
               </a:tr>
-              <a:tr h="487680">
+              <a:tr h="472440">
                 <a:tc>
                   <a:txBody>
                     <a:bodyPr/>
@@ -7167,7 +7167,7 @@
                   </a:tcPr>
                 </a:tc>
               </a:tr>
-              <a:tr h="487680">
+              <a:tr h="472440">
                 <a:tc>
                   <a:txBody>
                     <a:bodyPr/>
@@ -9023,7 +9023,7 @@
           </p:nvPr>
         </p:nvGraphicFramePr>
         <p:xfrm>
-          <a:off x="1065276" y="2245360"/>
+          <a:off x="1065276" y="2286635"/>
           <a:ext cx="10058400" cy="914400"/>
         </p:xfrm>
         <a:graphic>
@@ -9034,7 +9034,7 @@
                 <a:gridCol w="2212848"/>
                 <a:gridCol w="7845552"/>
               </a:tblGrid>
-              <a:tr h="528320">
+              <a:tr h="511810">
                 <a:tc>
                   <a:txBody>
                     <a:bodyPr/>
@@ -9172,7 +9172,7 @@
                   </a:tcPr>
                 </a:tc>
               </a:tr>
-              <a:tr h="528320">
+              <a:tr h="511810">
                 <a:tc>
                   <a:txBody>
                     <a:bodyPr/>
@@ -9310,7 +9310,7 @@
                   </a:tcPr>
                 </a:tc>
               </a:tr>
-              <a:tr h="528320">
+              <a:tr h="511810">
                 <a:tc>
                   <a:txBody>
                     <a:bodyPr/>
@@ -9448,7 +9448,7 @@
                   </a:tcPr>
                 </a:tc>
               </a:tr>
-              <a:tr h="528320">
+              <a:tr h="511810">
                 <a:tc>
                   <a:txBody>
                     <a:bodyPr/>
@@ -9586,7 +9586,7 @@
                   </a:tcPr>
                 </a:tc>
               </a:tr>
-              <a:tr h="528320">
+              <a:tr h="511810">
                 <a:tc>
                   <a:txBody>
                     <a:bodyPr/>
@@ -9965,7 +9965,7 @@
           </p:nvPr>
         </p:nvGraphicFramePr>
         <p:xfrm>
-          <a:off x="1065276" y="2712720"/>
+          <a:off x="1065276" y="2739390"/>
           <a:ext cx="10058400" cy="914400"/>
         </p:xfrm>
         <a:graphic>
@@ -9976,7 +9976,7 @@
                 <a:gridCol w="2514600"/>
                 <a:gridCol w="7543800"/>
               </a:tblGrid>
-              <a:tr h="568960">
+              <a:tr h="551180">
                 <a:tc>
                   <a:txBody>
                     <a:bodyPr/>
@@ -10114,7 +10114,7 @@
                   </a:tcPr>
                 </a:tc>
               </a:tr>
-              <a:tr h="568960">
+              <a:tr h="551180">
                 <a:tc>
                   <a:txBody>
                     <a:bodyPr/>
@@ -10252,7 +10252,7 @@
                   </a:tcPr>
                 </a:tc>
               </a:tr>
-              <a:tr h="568960">
+              <a:tr h="551180">
                 <a:tc>
                   <a:txBody>
                     <a:bodyPr/>
@@ -11836,7 +11836,7 @@
           </p:nvPr>
         </p:nvGraphicFramePr>
         <p:xfrm>
-          <a:off x="1522476" y="2143760"/>
+          <a:off x="1522476" y="2188210"/>
           <a:ext cx="9144000" cy="914400"/>
         </p:xfrm>
         <a:graphic>
@@ -11847,7 +11847,7 @@
                 <a:gridCol w="2286000"/>
                 <a:gridCol w="6858000"/>
               </a:tblGrid>
-              <a:tr h="568960">
+              <a:tr h="551180">
                 <a:tc>
                   <a:txBody>
                     <a:bodyPr/>
@@ -11985,7 +11985,7 @@
                   </a:tcPr>
                 </a:tc>
               </a:tr>
-              <a:tr h="568960">
+              <a:tr h="551180">
                 <a:tc>
                   <a:txBody>
                     <a:bodyPr/>
@@ -12123,7 +12123,7 @@
                   </a:tcPr>
                 </a:tc>
               </a:tr>
-              <a:tr h="568960">
+              <a:tr h="551180">
                 <a:tc>
                   <a:txBody>
                     <a:bodyPr/>
@@ -12261,7 +12261,7 @@
                   </a:tcPr>
                 </a:tc>
               </a:tr>
-              <a:tr h="568960">
+              <a:tr h="551180">
                 <a:tc>
                   <a:txBody>
                     <a:bodyPr/>
@@ -12399,7 +12399,7 @@
                   </a:tcPr>
                 </a:tc>
               </a:tr>
-              <a:tr h="568960">
+              <a:tr h="551180">
                 <a:tc>
                   <a:txBody>
                     <a:bodyPr/>
@@ -13160,12 +13160,12 @@
         </p:nvSpPr>
         <p:spPr>
           <a:xfrm>
-            <a:off x="548640" y="5349240"/>
-            <a:ext cx="11091672" cy="868680"/>
+            <a:off x="548640" y="4959096"/>
+            <a:ext cx="11091672" cy="1258824"/>
           </a:xfrm>
           <a:prstGeom prst="roundRect">
             <a:avLst>
-              <a:gd name="adj" fmla="val 12632"/>
+              <a:gd name="adj" fmla="val 8717"/>
             </a:avLst>
           </a:prstGeom>
           <a:solidFill>
@@ -13187,8 +13187,8 @@
         </p:nvSpPr>
         <p:spPr>
           <a:xfrm>
-            <a:off x="822960" y="5486400"/>
-            <a:ext cx="10543032" cy="594360"/>
+            <a:off x="822960" y="5096256"/>
+            <a:ext cx="10543032" cy="984504"/>
           </a:xfrm>
           <a:prstGeom prst="rect">
             <a:avLst/>
@@ -13236,7 +13236,7 @@
           </p:nvPr>
         </p:nvGraphicFramePr>
         <p:xfrm>
-          <a:off x="2894076" y="2103120"/>
+          <a:off x="2894076" y="2071878"/>
           <a:ext cx="6400800" cy="914400"/>
         </p:xfrm>
         <a:graphic>
@@ -13247,7 +13247,7 @@
                 <a:gridCol w="1920240"/>
                 <a:gridCol w="4480560"/>
               </a:tblGrid>
-              <a:tr h="487680">
+              <a:tr h="433070">
                 <a:tc>
                   <a:txBody>
                     <a:bodyPr/>
@@ -13257,7 +13257,7 @@
                         <a:buNone/>
                       </a:pPr>
                       <a:r>
-                        <a:rPr lang="en-US" sz="2400" b="1" dirty="0">
+                        <a:rPr lang="en-US" sz="2200" b="1" dirty="0">
                           <a:solidFill>
                             <a:srgbClr val="1F2937"/>
                           </a:solidFill>
@@ -13267,7 +13267,7 @@
                         </a:rPr>
                         <a:t>시간</a:t>
                       </a:r>
-                      <a:endParaRPr lang="en-US" sz="2400" dirty="0">
+                      <a:endParaRPr lang="en-US" sz="2200" dirty="0">
                         <a:latin typeface="맑은 고딕" charset="0"/>
                         <a:ea typeface="맑은 고딕" charset="0"/>
                         <a:cs typeface="맑은 고딕" charset="0"/>
@@ -13325,7 +13325,7 @@
                         <a:buNone/>
                       </a:pPr>
                       <a:r>
-                        <a:rPr lang="en-US" sz="2400" b="1" dirty="0">
+                        <a:rPr lang="en-US" sz="2200" b="1" dirty="0">
                           <a:solidFill>
                             <a:srgbClr val="1F2937"/>
                           </a:solidFill>
@@ -13335,7 +13335,7 @@
                         </a:rPr>
                         <a:t>장면</a:t>
                       </a:r>
-                      <a:endParaRPr lang="en-US" sz="2400" dirty="0">
+                      <a:endParaRPr lang="en-US" sz="2200" dirty="0">
                         <a:latin typeface="맑은 고딕" charset="0"/>
                         <a:ea typeface="맑은 고딕" charset="0"/>
                         <a:cs typeface="맑은 고딕" charset="0"/>
@@ -13385,7 +13385,7 @@
                   </a:tcPr>
                 </a:tc>
               </a:tr>
-              <a:tr h="487680">
+              <a:tr h="433070">
                 <a:tc>
                   <a:txBody>
                     <a:bodyPr/>
@@ -13395,7 +13395,7 @@
                         <a:buNone/>
                       </a:pPr>
                       <a:r>
-                        <a:rPr lang="en-US" sz="2400" dirty="0">
+                        <a:rPr lang="en-US" sz="2200" dirty="0">
                           <a:solidFill>
                             <a:srgbClr val="1F2937"/>
                           </a:solidFill>
@@ -13405,7 +13405,7 @@
                         </a:rPr>
                         <a:t>0:00</a:t>
                       </a:r>
-                      <a:endParaRPr lang="en-US" sz="2400" dirty="0">
+                      <a:endParaRPr lang="en-US" sz="2200" dirty="0">
                         <a:latin typeface="맑은 고딕" charset="0"/>
                         <a:ea typeface="맑은 고딕" charset="0"/>
                         <a:cs typeface="맑은 고딕" charset="0"/>
@@ -13463,7 +13463,7 @@
                         <a:buNone/>
                       </a:pPr>
                       <a:r>
-                        <a:rPr lang="en-US" sz="2400" dirty="0">
+                        <a:rPr lang="en-US" sz="2200" dirty="0">
                           <a:solidFill>
                             <a:srgbClr val="1F2937"/>
                           </a:solidFill>
@@ -13473,7 +13473,7 @@
                         </a:rPr>
                         <a:t>인사</a:t>
                       </a:r>
-                      <a:endParaRPr lang="en-US" sz="2400" dirty="0">
+                      <a:endParaRPr lang="en-US" sz="2200" dirty="0">
                         <a:latin typeface="맑은 고딕" charset="0"/>
                         <a:ea typeface="맑은 고딕" charset="0"/>
                         <a:cs typeface="맑은 고딕" charset="0"/>
@@ -13523,7 +13523,7 @@
                   </a:tcPr>
                 </a:tc>
               </a:tr>
-              <a:tr h="487680">
+              <a:tr h="433070">
                 <a:tc>
                   <a:txBody>
                     <a:bodyPr/>
@@ -13533,7 +13533,7 @@
                         <a:buNone/>
                       </a:pPr>
                       <a:r>
-                        <a:rPr lang="en-US" sz="2400" dirty="0">
+                        <a:rPr lang="en-US" sz="2200" dirty="0">
                           <a:solidFill>
                             <a:srgbClr val="1F2937"/>
                           </a:solidFill>
@@ -13543,7 +13543,7 @@
                         </a:rPr>
                         <a:t>0:20</a:t>
                       </a:r>
-                      <a:endParaRPr lang="en-US" sz="2400" dirty="0">
+                      <a:endParaRPr lang="en-US" sz="2200" dirty="0">
                         <a:latin typeface="맑은 고딕" charset="0"/>
                         <a:ea typeface="맑은 고딕" charset="0"/>
                         <a:cs typeface="맑은 고딕" charset="0"/>
@@ -13601,7 +13601,7 @@
                         <a:buNone/>
                       </a:pPr>
                       <a:r>
-                        <a:rPr lang="en-US" sz="2400" dirty="0">
+                        <a:rPr lang="en-US" sz="2200" dirty="0">
                           <a:solidFill>
                             <a:srgbClr val="1F2937"/>
                           </a:solidFill>
@@ -13611,7 +13611,7 @@
                         </a:rPr>
                         <a:t>준비물 알아보기</a:t>
                       </a:r>
-                      <a:endParaRPr lang="en-US" sz="2400" dirty="0">
+                      <a:endParaRPr lang="en-US" sz="2200" dirty="0">
                         <a:latin typeface="맑은 고딕" charset="0"/>
                         <a:ea typeface="맑은 고딕" charset="0"/>
                         <a:cs typeface="맑은 고딕" charset="0"/>
@@ -13661,7 +13661,7 @@
                   </a:tcPr>
                 </a:tc>
               </a:tr>
-              <a:tr h="487680">
+              <a:tr h="433070">
                 <a:tc>
                   <a:txBody>
                     <a:bodyPr/>
@@ -13671,7 +13671,7 @@
                         <a:buNone/>
                       </a:pPr>
                       <a:r>
-                        <a:rPr lang="en-US" sz="2400" dirty="0">
+                        <a:rPr lang="en-US" sz="2200" dirty="0">
                           <a:solidFill>
                             <a:srgbClr val="1F2937"/>
                           </a:solidFill>
@@ -13681,7 +13681,7 @@
                         </a:rPr>
                         <a:t>1:00</a:t>
                       </a:r>
-                      <a:endParaRPr lang="en-US" sz="2400" dirty="0">
+                      <a:endParaRPr lang="en-US" sz="2200" dirty="0">
                         <a:latin typeface="맑은 고딕" charset="0"/>
                         <a:ea typeface="맑은 고딕" charset="0"/>
                         <a:cs typeface="맑은 고딕" charset="0"/>
@@ -13739,7 +13739,7 @@
                         <a:buNone/>
                       </a:pPr>
                       <a:r>
-                        <a:rPr lang="en-US" sz="2400" dirty="0">
+                        <a:rPr lang="en-US" sz="2200" dirty="0">
                           <a:solidFill>
                             <a:srgbClr val="1F2937"/>
                           </a:solidFill>
@@ -13749,7 +13749,7 @@
                         </a:rPr>
                         <a:t>만드는 순서</a:t>
                       </a:r>
-                      <a:endParaRPr lang="en-US" sz="2400" dirty="0">
+                      <a:endParaRPr lang="en-US" sz="2200" dirty="0">
                         <a:latin typeface="맑은 고딕" charset="0"/>
                         <a:ea typeface="맑은 고딕" charset="0"/>
                         <a:cs typeface="맑은 고딕" charset="0"/>
@@ -13799,7 +13799,7 @@
                   </a:tcPr>
                 </a:tc>
               </a:tr>
-              <a:tr h="487680">
+              <a:tr h="433070">
                 <a:tc>
                   <a:txBody>
                     <a:bodyPr/>
@@ -13809,7 +13809,7 @@
                         <a:buNone/>
                       </a:pPr>
                       <a:r>
-                        <a:rPr lang="en-US" sz="2400" dirty="0">
+                        <a:rPr lang="en-US" sz="2200" dirty="0">
                           <a:solidFill>
                             <a:srgbClr val="1F2937"/>
                           </a:solidFill>
@@ -13819,7 +13819,7 @@
                         </a:rPr>
                         <a:t>3:10</a:t>
                       </a:r>
-                      <a:endParaRPr lang="en-US" sz="2400" dirty="0">
+                      <a:endParaRPr lang="en-US" sz="2200" dirty="0">
                         <a:latin typeface="맑은 고딕" charset="0"/>
                         <a:ea typeface="맑은 고딕" charset="0"/>
                         <a:cs typeface="맑은 고딕" charset="0"/>
@@ -13877,7 +13877,7 @@
                         <a:buNone/>
                       </a:pPr>
                       <a:r>
-                        <a:rPr lang="en-US" sz="2400" dirty="0">
+                        <a:rPr lang="en-US" sz="2200" dirty="0">
                           <a:solidFill>
                             <a:srgbClr val="1F2937"/>
                           </a:solidFill>
@@ -13887,7 +13887,7 @@
                         </a:rPr>
                         <a:t>소리 들어 보기</a:t>
                       </a:r>
-                      <a:endParaRPr lang="en-US" sz="2400" dirty="0">
+                      <a:endParaRPr lang="en-US" sz="2200" dirty="0">
                         <a:latin typeface="맑은 고딕" charset="0"/>
                         <a:ea typeface="맑은 고딕" charset="0"/>
                         <a:cs typeface="맑은 고딕" charset="0"/>
@@ -13937,7 +13937,7 @@
                   </a:tcPr>
                 </a:tc>
               </a:tr>
-              <a:tr h="487680">
+              <a:tr h="433070">
                 <a:tc>
                   <a:txBody>
                     <a:bodyPr/>
@@ -13947,7 +13947,7 @@
                         <a:buNone/>
                       </a:pPr>
                       <a:r>
-                        <a:rPr lang="en-US" sz="2400" dirty="0">
+                        <a:rPr lang="en-US" sz="2200" dirty="0">
                           <a:solidFill>
                             <a:srgbClr val="1F2937"/>
                           </a:solidFill>
@@ -13957,7 +13957,7 @@
                         </a:rPr>
                         <a:t>4:00</a:t>
                       </a:r>
-                      <a:endParaRPr lang="en-US" sz="2400" dirty="0">
+                      <a:endParaRPr lang="en-US" sz="2200" dirty="0">
                         <a:latin typeface="맑은 고딕" charset="0"/>
                         <a:ea typeface="맑은 고딕" charset="0"/>
                         <a:cs typeface="맑은 고딕" charset="0"/>
@@ -14015,7 +14015,7 @@
                         <a:buNone/>
                       </a:pPr>
                       <a:r>
-                        <a:rPr lang="en-US" sz="2400" dirty="0">
+                        <a:rPr lang="en-US" sz="2200" dirty="0">
                           <a:solidFill>
                             <a:srgbClr val="1F2937"/>
                           </a:solidFill>
@@ -14025,7 +14025,7 @@
                         </a:rPr>
                         <a:t>정리하기</a:t>
                       </a:r>
-                      <a:endParaRPr lang="en-US" sz="2400" dirty="0">
+                      <a:endParaRPr lang="en-US" sz="2200" dirty="0">
                         <a:latin typeface="맑은 고딕" charset="0"/>
                         <a:ea typeface="맑은 고딕" charset="0"/>
                         <a:cs typeface="맑은 고딕" charset="0"/>
